--- a/presentations/b10-cloud-boundary/B10_Cloud_Boundary_Narrated.pptx
+++ b/presentations/b10-cloud-boundary/B10_Cloud_Boundary_Narrated.pptx
@@ -189,7 +189,7 @@
     </p:spTree>
     <p:extLst>
       <p:ext uri="{BB962C8B-B14F-4D97-AF65-F5344CB8AC3E}">
-        <p14:creationId xmlns:p14="http://schemas.microsoft.com/office/powerpoint/2010/main" val="3860488251"/>
+        <p14:creationId xmlns:p14="http://schemas.microsoft.com/office/powerpoint/2010/main" val="2555951398"/>
       </p:ext>
     </p:extLst>
   </p:cSld>
@@ -2616,7 +2616,7 @@
             <a:hlinkClick r:id="" action="ppaction://media"/>
             <a:extLst>
               <a:ext uri="{FF2B5EF4-FFF2-40B4-BE49-F238E27FC236}">
-                <a16:creationId xmlns:a16="http://schemas.microsoft.com/office/drawing/2014/main" id="{0CF098AE-E59A-934A-E181-D7FDCEA03EDE}"/>
+                <a16:creationId xmlns:a16="http://schemas.microsoft.com/office/drawing/2014/main" id="{FF349CDE-901F-8A40-02E6-FD8E0FBEEBCE}"/>
               </a:ext>
             </a:extLst>
           </p:cNvPr>
@@ -2632,7 +2632,7 @@
                     <p:ext uri="{3AFAAA56-56D3-431D-BCD4-E75A35582382}">
                       <p173:tracksInfo xmlns:p173="http://schemas.microsoft.com/office/powerpoint/2017/3/main" displayLoc="slide">
                         <p173:trackLst>
-                          <p173:track id="{09BB8B00-0A43-413F-8894-CC2BAB8EC9BB}" label="English (captions)" lang="en-US" r:embed="rId6"/>
+                          <p173:track id="{7978751C-78E8-4057-9215-2919CC911CE1}" label="English (captions)" lang="en-US" r:embed="rId6"/>
                         </p173:trackLst>
                       </p173:tracksInfo>
                     </p:ext>
@@ -2650,7 +2650,7 @@
         </p:blipFill>
         <p:spPr>
           <a:xfrm>
-            <a:off x="127000" y="6350000"/>
+            <a:off x="12446000" y="127000"/>
             <a:ext cx="304800" cy="304800"/>
           </a:xfrm>
           <a:prstGeom prst="rect">
@@ -4038,7 +4038,7 @@
             <a:hlinkClick r:id="" action="ppaction://media"/>
             <a:extLst>
               <a:ext uri="{FF2B5EF4-FFF2-40B4-BE49-F238E27FC236}">
-                <a16:creationId xmlns:a16="http://schemas.microsoft.com/office/drawing/2014/main" id="{BA795E28-BD02-C7D7-745F-429BEA04616F}"/>
+                <a16:creationId xmlns:a16="http://schemas.microsoft.com/office/drawing/2014/main" id="{C65A70C7-334C-EE4C-F6FD-416C6D628B38}"/>
               </a:ext>
             </a:extLst>
           </p:cNvPr>
@@ -4054,7 +4054,7 @@
                     <p:ext uri="{3AFAAA56-56D3-431D-BCD4-E75A35582382}">
                       <p173:tracksInfo xmlns:p173="http://schemas.microsoft.com/office/powerpoint/2017/3/main" displayLoc="slide">
                         <p173:trackLst>
-                          <p173:track id="{DEEA287D-002F-48C2-8042-FB745ED7FADD}" label="English (captions)" lang="en-US" r:embed="rId9"/>
+                          <p173:track id="{A65DA54D-51C4-4A06-9160-DC1807A6CC69}" label="English (captions)" lang="en-US" r:embed="rId9"/>
                         </p173:trackLst>
                       </p173:tracksInfo>
                     </p:ext>
@@ -4072,7 +4072,7 @@
         </p:blipFill>
         <p:spPr>
           <a:xfrm>
-            <a:off x="127000" y="6350000"/>
+            <a:off x="12446000" y="127000"/>
             <a:ext cx="304800" cy="304800"/>
           </a:xfrm>
           <a:prstGeom prst="rect">
@@ -5229,7 +5229,7 @@
             <a:hlinkClick r:id="" action="ppaction://media"/>
             <a:extLst>
               <a:ext uri="{FF2B5EF4-FFF2-40B4-BE49-F238E27FC236}">
-                <a16:creationId xmlns:a16="http://schemas.microsoft.com/office/drawing/2014/main" id="{EC64D79C-A25D-8225-8380-8823C0A0622D}"/>
+                <a16:creationId xmlns:a16="http://schemas.microsoft.com/office/drawing/2014/main" id="{0B8A4CF5-6168-2B75-5F96-D4C57B8ECBE5}"/>
               </a:ext>
             </a:extLst>
           </p:cNvPr>
@@ -5245,7 +5245,7 @@
                     <p:ext uri="{3AFAAA56-56D3-431D-BCD4-E75A35582382}">
                       <p173:tracksInfo xmlns:p173="http://schemas.microsoft.com/office/powerpoint/2017/3/main" displayLoc="slide">
                         <p173:trackLst>
-                          <p173:track id="{7F227EB7-4063-4C63-AE8A-8E47E9B3C848}" label="English (captions)" lang="en-US" r:embed="rId8"/>
+                          <p173:track id="{F536BE1A-8C32-44D5-99C5-30D07EB6A15E}" label="English (captions)" lang="en-US" r:embed="rId8"/>
                         </p173:trackLst>
                       </p173:tracksInfo>
                     </p:ext>
@@ -5263,7 +5263,7 @@
         </p:blipFill>
         <p:spPr>
           <a:xfrm>
-            <a:off x="127000" y="6350000"/>
+            <a:off x="12446000" y="127000"/>
             <a:ext cx="304800" cy="304800"/>
           </a:xfrm>
           <a:prstGeom prst="rect">
@@ -7150,7 +7150,7 @@
             <a:hlinkClick r:id="" action="ppaction://media"/>
             <a:extLst>
               <a:ext uri="{FF2B5EF4-FFF2-40B4-BE49-F238E27FC236}">
-                <a16:creationId xmlns:a16="http://schemas.microsoft.com/office/drawing/2014/main" id="{83522185-48E5-8C69-5299-3316DDD8BCF2}"/>
+                <a16:creationId xmlns:a16="http://schemas.microsoft.com/office/drawing/2014/main" id="{4603D308-6BE0-2939-2DC5-DB4533CEC2B5}"/>
               </a:ext>
             </a:extLst>
           </p:cNvPr>
@@ -7166,7 +7166,7 @@
                     <p:ext uri="{3AFAAA56-56D3-431D-BCD4-E75A35582382}">
                       <p173:tracksInfo xmlns:p173="http://schemas.microsoft.com/office/powerpoint/2017/3/main" displayLoc="slide">
                         <p173:trackLst>
-                          <p173:track id="{47303A51-9487-4C5D-B683-7DD69B23A5B1}" label="English (captions)" lang="en-US" r:embed="rId8"/>
+                          <p173:track id="{9F8EE3F3-8385-42AE-BA85-93C1074FF19D}" label="English (captions)" lang="en-US" r:embed="rId8"/>
                         </p173:trackLst>
                       </p173:tracksInfo>
                     </p:ext>
@@ -7184,7 +7184,7 @@
         </p:blipFill>
         <p:spPr>
           <a:xfrm>
-            <a:off x="127000" y="6350000"/>
+            <a:off x="12446000" y="127000"/>
             <a:ext cx="304800" cy="304800"/>
           </a:xfrm>
           <a:prstGeom prst="rect">
@@ -9397,7 +9397,7 @@
             <a:hlinkClick r:id="" action="ppaction://media"/>
             <a:extLst>
               <a:ext uri="{FF2B5EF4-FFF2-40B4-BE49-F238E27FC236}">
-                <a16:creationId xmlns:a16="http://schemas.microsoft.com/office/drawing/2014/main" id="{0C38F97D-1BAE-0ADE-A9BC-20316D090050}"/>
+                <a16:creationId xmlns:a16="http://schemas.microsoft.com/office/drawing/2014/main" id="{A6878146-A477-F2A2-CDFF-282D0224B94B}"/>
               </a:ext>
             </a:extLst>
           </p:cNvPr>
@@ -9413,7 +9413,7 @@
                     <p:ext uri="{3AFAAA56-56D3-431D-BCD4-E75A35582382}">
                       <p173:tracksInfo xmlns:p173="http://schemas.microsoft.com/office/powerpoint/2017/3/main" displayLoc="slide">
                         <p173:trackLst>
-                          <p173:track id="{96FBA5C0-3834-4CFE-A079-62190BD9EAC8}" label="English (captions)" lang="en-US" r:embed="rId8"/>
+                          <p173:track id="{59BD118C-10C1-4C94-AC0B-DC63EA8BE4BA}" label="English (captions)" lang="en-US" r:embed="rId8"/>
                         </p173:trackLst>
                       </p173:tracksInfo>
                     </p:ext>
@@ -9431,7 +9431,7 @@
         </p:blipFill>
         <p:spPr>
           <a:xfrm>
-            <a:off x="127000" y="6350000"/>
+            <a:off x="12446000" y="127000"/>
             <a:ext cx="304800" cy="304800"/>
           </a:xfrm>
           <a:prstGeom prst="rect">
@@ -10812,7 +10812,7 @@
             <a:hlinkClick r:id="" action="ppaction://media"/>
             <a:extLst>
               <a:ext uri="{FF2B5EF4-FFF2-40B4-BE49-F238E27FC236}">
-                <a16:creationId xmlns:a16="http://schemas.microsoft.com/office/drawing/2014/main" id="{25F2C2D2-E400-5665-9764-ADCC0D894E25}"/>
+                <a16:creationId xmlns:a16="http://schemas.microsoft.com/office/drawing/2014/main" id="{C8828B30-02A3-A02F-EF57-76547C3D1275}"/>
               </a:ext>
             </a:extLst>
           </p:cNvPr>
@@ -10828,7 +10828,7 @@
                     <p:ext uri="{3AFAAA56-56D3-431D-BCD4-E75A35582382}">
                       <p173:tracksInfo xmlns:p173="http://schemas.microsoft.com/office/powerpoint/2017/3/main" displayLoc="slide">
                         <p173:trackLst>
-                          <p173:track id="{9BADAC6F-E919-42F2-B496-6FD9394E9E3D}" label="English (captions)" lang="en-US" r:embed="rId7"/>
+                          <p173:track id="{9780BE8D-C46C-4857-8704-103D438675C5}" label="English (captions)" lang="en-US" r:embed="rId7"/>
                         </p173:trackLst>
                       </p173:tracksInfo>
                     </p:ext>
@@ -10846,7 +10846,7 @@
         </p:blipFill>
         <p:spPr>
           <a:xfrm>
-            <a:off x="127000" y="6350000"/>
+            <a:off x="12446000" y="127000"/>
             <a:ext cx="304800" cy="304800"/>
           </a:xfrm>
           <a:prstGeom prst="rect">
@@ -11915,7 +11915,7 @@
             <a:hlinkClick r:id="" action="ppaction://media"/>
             <a:extLst>
               <a:ext uri="{FF2B5EF4-FFF2-40B4-BE49-F238E27FC236}">
-                <a16:creationId xmlns:a16="http://schemas.microsoft.com/office/drawing/2014/main" id="{54DF807B-991F-BED3-8FAA-A1CACF2B80EB}"/>
+                <a16:creationId xmlns:a16="http://schemas.microsoft.com/office/drawing/2014/main" id="{04343A87-98A9-1662-48FF-11B10362E3FC}"/>
               </a:ext>
             </a:extLst>
           </p:cNvPr>
@@ -11931,7 +11931,7 @@
                     <p:ext uri="{3AFAAA56-56D3-431D-BCD4-E75A35582382}">
                       <p173:tracksInfo xmlns:p173="http://schemas.microsoft.com/office/powerpoint/2017/3/main" displayLoc="slide">
                         <p173:trackLst>
-                          <p173:track id="{3D7B1F07-C586-4397-905D-AFEBA3DBAAB0}" label="English (captions)" lang="en-US" r:embed="rId11"/>
+                          <p173:track id="{0F916201-4BCB-42EE-A456-6FDA93498355}" label="English (captions)" lang="en-US" r:embed="rId11"/>
                         </p173:trackLst>
                       </p173:tracksInfo>
                     </p:ext>
@@ -11949,7 +11949,7 @@
         </p:blipFill>
         <p:spPr>
           <a:xfrm>
-            <a:off x="127000" y="6350000"/>
+            <a:off x="12446000" y="127000"/>
             <a:ext cx="304800" cy="304800"/>
           </a:xfrm>
           <a:prstGeom prst="rect">
@@ -13068,7 +13068,7 @@
             <a:hlinkClick r:id="" action="ppaction://media"/>
             <a:extLst>
               <a:ext uri="{FF2B5EF4-FFF2-40B4-BE49-F238E27FC236}">
-                <a16:creationId xmlns:a16="http://schemas.microsoft.com/office/drawing/2014/main" id="{3FEEB008-0E28-8846-DD86-7C1DC088F111}"/>
+                <a16:creationId xmlns:a16="http://schemas.microsoft.com/office/drawing/2014/main" id="{37E86200-C452-1A44-E8C8-91B660311150}"/>
               </a:ext>
             </a:extLst>
           </p:cNvPr>
@@ -13084,7 +13084,7 @@
                     <p:ext uri="{3AFAAA56-56D3-431D-BCD4-E75A35582382}">
                       <p173:tracksInfo xmlns:p173="http://schemas.microsoft.com/office/powerpoint/2017/3/main" displayLoc="slide">
                         <p173:trackLst>
-                          <p173:track id="{8A903D5E-334F-420A-8A7A-B7F974D8BF3C}" label="English (captions)" lang="en-US" r:embed="rId10"/>
+                          <p173:track id="{090244DB-79DF-4B63-8BB2-A6BD7E15386C}" label="English (captions)" lang="en-US" r:embed="rId10"/>
                         </p173:trackLst>
                       </p173:tracksInfo>
                     </p:ext>
@@ -13102,7 +13102,7 @@
         </p:blipFill>
         <p:spPr>
           <a:xfrm>
-            <a:off x="127000" y="6350000"/>
+            <a:off x="12446000" y="127000"/>
             <a:ext cx="304800" cy="304800"/>
           </a:xfrm>
           <a:prstGeom prst="rect">
@@ -14827,7 +14827,7 @@
             <a:hlinkClick r:id="" action="ppaction://media"/>
             <a:extLst>
               <a:ext uri="{FF2B5EF4-FFF2-40B4-BE49-F238E27FC236}">
-                <a16:creationId xmlns:a16="http://schemas.microsoft.com/office/drawing/2014/main" id="{D6FC74C3-5A16-35DF-A4AC-7F22D31B8AE2}"/>
+                <a16:creationId xmlns:a16="http://schemas.microsoft.com/office/drawing/2014/main" id="{212FFC2F-4798-782E-1219-C17F3CBC4D3E}"/>
               </a:ext>
             </a:extLst>
           </p:cNvPr>
@@ -14843,7 +14843,7 @@
                     <p:ext uri="{3AFAAA56-56D3-431D-BCD4-E75A35582382}">
                       <p173:tracksInfo xmlns:p173="http://schemas.microsoft.com/office/powerpoint/2017/3/main" displayLoc="slide">
                         <p173:trackLst>
-                          <p173:track id="{A189A6C2-8FA7-497F-94A4-B9F9FB6D9442}" label="English (captions)" lang="en-US" r:embed="rId7"/>
+                          <p173:track id="{B19A4AE9-6162-42AA-9909-1047F198E115}" label="English (captions)" lang="en-US" r:embed="rId7"/>
                         </p173:trackLst>
                       </p173:tracksInfo>
                     </p:ext>
@@ -14861,7 +14861,7 @@
         </p:blipFill>
         <p:spPr>
           <a:xfrm>
-            <a:off x="127000" y="6350000"/>
+            <a:off x="12446000" y="127000"/>
             <a:ext cx="304800" cy="304800"/>
           </a:xfrm>
           <a:prstGeom prst="rect">
@@ -16999,7 +16999,7 @@
             <a:hlinkClick r:id="" action="ppaction://media"/>
             <a:extLst>
               <a:ext uri="{FF2B5EF4-FFF2-40B4-BE49-F238E27FC236}">
-                <a16:creationId xmlns:a16="http://schemas.microsoft.com/office/drawing/2014/main" id="{2AFB2C31-8C7A-0F8A-6DEE-C7150A75C288}"/>
+                <a16:creationId xmlns:a16="http://schemas.microsoft.com/office/drawing/2014/main" id="{9085BDA4-3374-D5DE-EDC4-601E86DBB3F1}"/>
               </a:ext>
             </a:extLst>
           </p:cNvPr>
@@ -17015,7 +17015,7 @@
                     <p:ext uri="{3AFAAA56-56D3-431D-BCD4-E75A35582382}">
                       <p173:tracksInfo xmlns:p173="http://schemas.microsoft.com/office/powerpoint/2017/3/main" displayLoc="slide">
                         <p173:trackLst>
-                          <p173:track id="{B4F346DD-AE2D-43D5-BAA3-F9BAAA77DE6B}" label="English (captions)" lang="en-US" r:embed="rId8"/>
+                          <p173:track id="{D9B76F30-88C6-4194-A66E-08442B86997F}" label="English (captions)" lang="en-US" r:embed="rId8"/>
                         </p173:trackLst>
                       </p173:tracksInfo>
                     </p:ext>
@@ -17033,7 +17033,7 @@
         </p:blipFill>
         <p:spPr>
           <a:xfrm>
-            <a:off x="127000" y="6350000"/>
+            <a:off x="12446000" y="127000"/>
             <a:ext cx="304800" cy="304800"/>
           </a:xfrm>
           <a:prstGeom prst="rect">
@@ -18152,7 +18152,7 @@
             <a:hlinkClick r:id="" action="ppaction://media"/>
             <a:extLst>
               <a:ext uri="{FF2B5EF4-FFF2-40B4-BE49-F238E27FC236}">
-                <a16:creationId xmlns:a16="http://schemas.microsoft.com/office/drawing/2014/main" id="{B56EB5E6-37FE-A611-CFFD-0580C701C71B}"/>
+                <a16:creationId xmlns:a16="http://schemas.microsoft.com/office/drawing/2014/main" id="{45E6FD77-E994-0C15-F50B-315E0BD803F1}"/>
               </a:ext>
             </a:extLst>
           </p:cNvPr>
@@ -18168,7 +18168,7 @@
                     <p:ext uri="{3AFAAA56-56D3-431D-BCD4-E75A35582382}">
                       <p173:tracksInfo xmlns:p173="http://schemas.microsoft.com/office/powerpoint/2017/3/main" displayLoc="slide">
                         <p173:trackLst>
-                          <p173:track id="{057CA2D7-1CD1-4878-8319-F895AD7B8BFC}" label="English (captions)" lang="en-US" r:embed="rId10"/>
+                          <p173:track id="{BE2F8AF8-993E-44F0-BA53-8F1292E61129}" label="English (captions)" lang="en-US" r:embed="rId10"/>
                         </p173:trackLst>
                       </p173:tracksInfo>
                     </p:ext>
@@ -18186,7 +18186,7 @@
         </p:blipFill>
         <p:spPr>
           <a:xfrm>
-            <a:off x="127000" y="6350000"/>
+            <a:off x="12446000" y="127000"/>
             <a:ext cx="304800" cy="304800"/>
           </a:xfrm>
           <a:prstGeom prst="rect">
@@ -20882,7 +20882,7 @@
             <a:hlinkClick r:id="" action="ppaction://media"/>
             <a:extLst>
               <a:ext uri="{FF2B5EF4-FFF2-40B4-BE49-F238E27FC236}">
-                <a16:creationId xmlns:a16="http://schemas.microsoft.com/office/drawing/2014/main" id="{FE8BBFC1-0B9A-3341-21AC-D99BD3E5A159}"/>
+                <a16:creationId xmlns:a16="http://schemas.microsoft.com/office/drawing/2014/main" id="{BDFFE9DD-A2A1-4DF1-6366-58799BF84D5C}"/>
               </a:ext>
             </a:extLst>
           </p:cNvPr>
@@ -20898,7 +20898,7 @@
                     <p:ext uri="{3AFAAA56-56D3-431D-BCD4-E75A35582382}">
                       <p173:tracksInfo xmlns:p173="http://schemas.microsoft.com/office/powerpoint/2017/3/main" displayLoc="slide">
                         <p173:trackLst>
-                          <p173:track id="{1F301466-3651-4044-8882-F522AFADDC57}" label="English (captions)" lang="en-US" r:embed="rId8"/>
+                          <p173:track id="{5804D39A-C2C2-4FBE-9F32-3DEE0B1D050D}" label="English (captions)" lang="en-US" r:embed="rId8"/>
                         </p173:trackLst>
                       </p173:tracksInfo>
                     </p:ext>
@@ -20916,7 +20916,7 @@
         </p:blipFill>
         <p:spPr>
           <a:xfrm>
-            <a:off x="127000" y="6350000"/>
+            <a:off x="12446000" y="127000"/>
             <a:ext cx="304800" cy="304800"/>
           </a:xfrm>
           <a:prstGeom prst="rect">
@@ -22091,7 +22091,7 @@
             <a:hlinkClick r:id="" action="ppaction://media"/>
             <a:extLst>
               <a:ext uri="{FF2B5EF4-FFF2-40B4-BE49-F238E27FC236}">
-                <a16:creationId xmlns:a16="http://schemas.microsoft.com/office/drawing/2014/main" id="{72852A1A-5008-646B-DFAA-CDA20C831A5C}"/>
+                <a16:creationId xmlns:a16="http://schemas.microsoft.com/office/drawing/2014/main" id="{201156D7-71D0-244F-8BE2-CE286241031C}"/>
               </a:ext>
             </a:extLst>
           </p:cNvPr>
@@ -22107,7 +22107,7 @@
                     <p:ext uri="{3AFAAA56-56D3-431D-BCD4-E75A35582382}">
                       <p173:tracksInfo xmlns:p173="http://schemas.microsoft.com/office/powerpoint/2017/3/main" displayLoc="slide">
                         <p173:trackLst>
-                          <p173:track id="{B0BD525C-04F9-48FB-8286-319C7C84E7EE}" label="English (captions)" lang="en-US" r:embed="rId8"/>
+                          <p173:track id="{2A6692A8-BF7A-42EC-B607-27755F42B95E}" label="English (captions)" lang="en-US" r:embed="rId8"/>
                         </p173:trackLst>
                       </p173:tracksInfo>
                     </p:ext>
@@ -22125,7 +22125,7 @@
         </p:blipFill>
         <p:spPr>
           <a:xfrm>
-            <a:off x="127000" y="6350000"/>
+            <a:off x="12446000" y="127000"/>
             <a:ext cx="304800" cy="304800"/>
           </a:xfrm>
           <a:prstGeom prst="rect">
@@ -23198,7 +23198,7 @@
             <a:hlinkClick r:id="" action="ppaction://media"/>
             <a:extLst>
               <a:ext uri="{FF2B5EF4-FFF2-40B4-BE49-F238E27FC236}">
-                <a16:creationId xmlns:a16="http://schemas.microsoft.com/office/drawing/2014/main" id="{CE8AFEAA-D370-D15C-BB91-8D92073190F8}"/>
+                <a16:creationId xmlns:a16="http://schemas.microsoft.com/office/drawing/2014/main" id="{84B9C42B-79FD-0EC7-1AF3-13BD1164D8D7}"/>
               </a:ext>
             </a:extLst>
           </p:cNvPr>
@@ -23214,7 +23214,7 @@
                     <p:ext uri="{3AFAAA56-56D3-431D-BCD4-E75A35582382}">
                       <p173:tracksInfo xmlns:p173="http://schemas.microsoft.com/office/powerpoint/2017/3/main" displayLoc="slide">
                         <p173:trackLst>
-                          <p173:track id="{24028CC8-3762-4FA0-AEFC-28C4E0FADE40}" label="English (captions)" lang="en-US" r:embed="rId8"/>
+                          <p173:track id="{64C7B06A-E0E5-46C1-8D0B-CAF3D9825EF2}" label="English (captions)" lang="en-US" r:embed="rId8"/>
                         </p173:trackLst>
                       </p173:tracksInfo>
                     </p:ext>
@@ -23232,7 +23232,7 @@
         </p:blipFill>
         <p:spPr>
           <a:xfrm>
-            <a:off x="127000" y="6350000"/>
+            <a:off x="12446000" y="127000"/>
             <a:ext cx="304800" cy="304800"/>
           </a:xfrm>
           <a:prstGeom prst="rect">
@@ -24759,7 +24759,7 @@
             <a:hlinkClick r:id="" action="ppaction://media"/>
             <a:extLst>
               <a:ext uri="{FF2B5EF4-FFF2-40B4-BE49-F238E27FC236}">
-                <a16:creationId xmlns:a16="http://schemas.microsoft.com/office/drawing/2014/main" id="{514787E2-4B1F-7588-6FE5-E90CC4C12255}"/>
+                <a16:creationId xmlns:a16="http://schemas.microsoft.com/office/drawing/2014/main" id="{E2822F79-2988-42C5-C5B9-BF0AACFE6EFC}"/>
               </a:ext>
             </a:extLst>
           </p:cNvPr>
@@ -24775,7 +24775,7 @@
                     <p:ext uri="{3AFAAA56-56D3-431D-BCD4-E75A35582382}">
                       <p173:tracksInfo xmlns:p173="http://schemas.microsoft.com/office/powerpoint/2017/3/main" displayLoc="slide">
                         <p173:trackLst>
-                          <p173:track id="{2E58F77D-8B51-4108-A509-DF810381EABE}" label="English (captions)" lang="en-US" r:embed="rId9"/>
+                          <p173:track id="{E35497C2-A0A5-4759-A2A5-4C61673F8315}" label="English (captions)" lang="en-US" r:embed="rId9"/>
                         </p173:trackLst>
                       </p173:tracksInfo>
                     </p:ext>
@@ -24793,7 +24793,7 @@
         </p:blipFill>
         <p:spPr>
           <a:xfrm>
-            <a:off x="127000" y="6350000"/>
+            <a:off x="12446000" y="127000"/>
             <a:ext cx="304800" cy="304800"/>
           </a:xfrm>
           <a:prstGeom prst="rect">
